--- a/apresentacoes/sinir_mtr/Nunes_Lucato_MTR_Login_Unico_Govbr.pptx
+++ b/apresentacoes/sinir_mtr/Nunes_Lucato_MTR_Login_Unico_Govbr.pptx
@@ -6832,7 +6832,7 @@
                 </a:solidFill>
                 <a:latin typeface="Montserrat SemiBold"/>
               </a:rPr>
-              <a:t>[INSERIR CELULAR]</a:t>
+              <a:t>(11) 94755-1771</a:t>
             </a:r>
           </a:p>
         </p:txBody>
@@ -7213,7 +7213,7 @@
                 </a:solidFill>
                 <a:latin typeface="Montserrat"/>
               </a:rPr>
-              <a:t>O CPF é o que liga a conta Gov.br dela à sua unidade: um dígito errado impede o vínculo. Os campos marcados com asterisco são obrigatórios.</a:t>
+              <a:t>Os cinco campos acima são os obrigatórios (marcados com asterisco no sistema). O CPF é o que liga a conta Gov.br dela à sua unidade: um dígito errado impede o vínculo.</a:t>
             </a:r>
           </a:p>
         </p:txBody>
@@ -29155,7 +29155,7 @@
                 </a:solidFill>
                 <a:latin typeface="Montserrat SemiBold"/>
               </a:rPr>
-              <a:t>[INSERIR TELEFONE]</a:t>
+              <a:t>(11) 94755-1771</a:t>
             </a:r>
           </a:p>
         </p:txBody>
